--- a/curso_es/pptx/S38.pptx
+++ b/curso_es/pptx/S38.pptx
@@ -7188,7 +7188,7 @@
                           </a:solidFill>
                           <a:latin typeface="Nunito Sans"/>
                         </a:rPr>
-                        <a:t>Aitor: 92 puntos</a:t>
+                        <a:t>Una chica: 92 puntos</a:t>
                       </a:r>
                     </a:p>
                   </a:txBody>
@@ -7256,7 +7256,7 @@
                           </a:solidFill>
                           <a:latin typeface="Nunito Sans"/>
                         </a:rPr>
-                        <a:t>Chen: 98 puntos</a:t>
+                        <a:t>Un chico: 98 puntos</a:t>
                       </a:r>
                     </a:p>
                   </a:txBody>
@@ -7368,7 +7368,7 @@
                           </a:solidFill>
                           <a:latin typeface="Nunito Sans"/>
                         </a:rPr>
-                        <a:t>¡Chen tiene cuatro veces más!</a:t>
+                        <a:t>¡El chico tiene cuatro veces más!</a:t>
                       </a:r>
                     </a:p>
                   </a:txBody>
